--- a/output/05-security-privacy/05-03-multi-factor-authentication.pptx
+++ b/output/05-security-privacy/05-03-multi-factor-authentication.pptx
@@ -56584,7 +56584,7 @@
         <p:spPr>
           <a:xfrm>
             <a:off x="502920" y="1719072"/>
-            <a:ext cx="8343671" cy="822959"/>
+            <a:ext cx="8343671" cy="1371600"/>
           </a:xfrm>
           <a:prstGeom prst="rect">
             <a:avLst/>
@@ -56615,7 +56615,7 @@
                 </a:solidFill>
                 <a:latin typeface="Segoe UI"/>
               </a:rPr>
-              <a:t>A password is something you know. It can be stolen without you noticing. A second factor is something you physically have.</a:t>
+              <a:t>Security people group proof of identity into three kinds: something you know (a password), something you have (your phone or a security key), and something you are (a fingerprint or your face). MFA means adding a second kind — in the systems you use day to day, usually something you have.</a:t>
             </a:r>
           </a:p>
         </p:txBody>
@@ -56628,7 +56628,7 @@
         </p:nvSpPr>
         <p:spPr>
           <a:xfrm>
-            <a:off x="502920" y="3209544"/>
+            <a:off x="502920" y="3675887"/>
             <a:ext cx="2508427" cy="1920240"/>
           </a:xfrm>
           <a:prstGeom prst="roundRect">
@@ -56672,7 +56672,7 @@
         </p:nvSpPr>
         <p:spPr>
           <a:xfrm>
-            <a:off x="685800" y="3026663"/>
+            <a:off x="685800" y="3493007"/>
             <a:ext cx="384048" cy="384048"/>
           </a:xfrm>
           <a:prstGeom prst="ellipse">
@@ -56714,7 +56714,7 @@
         </p:nvSpPr>
         <p:spPr>
           <a:xfrm>
-            <a:off x="685800" y="3104387"/>
+            <a:off x="685800" y="3570731"/>
             <a:ext cx="384048" cy="237744"/>
           </a:xfrm>
           <a:prstGeom prst="rect">
@@ -56759,7 +56759,7 @@
         </p:nvSpPr>
         <p:spPr>
           <a:xfrm>
-            <a:off x="704088" y="3575303"/>
+            <a:off x="704088" y="4041648"/>
             <a:ext cx="2106091" cy="512064"/>
           </a:xfrm>
           <a:prstGeom prst="rect">
@@ -56804,7 +56804,7 @@
         </p:nvSpPr>
         <p:spPr>
           <a:xfrm>
-            <a:off x="704088" y="4123944"/>
+            <a:off x="704088" y="4590288"/>
             <a:ext cx="2106091" cy="841248"/>
           </a:xfrm>
           <a:prstGeom prst="rect">
@@ -56849,7 +56849,7 @@
         </p:nvCxnSpPr>
         <p:spPr>
           <a:xfrm>
-            <a:off x="3093643" y="4169663"/>
+            <a:off x="3093643" y="4636007"/>
             <a:ext cx="219456" cy="0"/>
           </a:xfrm>
           <a:prstGeom prst="line">
@@ -56886,7 +56886,7 @@
         </p:nvSpPr>
         <p:spPr>
           <a:xfrm>
-            <a:off x="3395395" y="3209544"/>
+            <a:off x="3395395" y="3675887"/>
             <a:ext cx="2508427" cy="1920240"/>
           </a:xfrm>
           <a:prstGeom prst="roundRect">
@@ -56930,7 +56930,7 @@
         </p:nvSpPr>
         <p:spPr>
           <a:xfrm>
-            <a:off x="3578275" y="3026663"/>
+            <a:off x="3578275" y="3493007"/>
             <a:ext cx="384048" cy="384048"/>
           </a:xfrm>
           <a:prstGeom prst="ellipse">
@@ -56972,7 +56972,7 @@
         </p:nvSpPr>
         <p:spPr>
           <a:xfrm>
-            <a:off x="3578275" y="3104387"/>
+            <a:off x="3578275" y="3570731"/>
             <a:ext cx="384048" cy="237744"/>
           </a:xfrm>
           <a:prstGeom prst="rect">
@@ -57017,7 +57017,7 @@
         </p:nvSpPr>
         <p:spPr>
           <a:xfrm>
-            <a:off x="3596563" y="3575303"/>
+            <a:off x="3596563" y="4041648"/>
             <a:ext cx="2106091" cy="512064"/>
           </a:xfrm>
           <a:prstGeom prst="rect">
@@ -57062,7 +57062,7 @@
         </p:nvSpPr>
         <p:spPr>
           <a:xfrm>
-            <a:off x="3596563" y="4123944"/>
+            <a:off x="3596563" y="4590288"/>
             <a:ext cx="2106091" cy="841248"/>
           </a:xfrm>
           <a:prstGeom prst="rect">
@@ -57107,7 +57107,7 @@
         </p:nvCxnSpPr>
         <p:spPr>
           <a:xfrm>
-            <a:off x="5986119" y="4169663"/>
+            <a:off x="5986119" y="4636007"/>
             <a:ext cx="219456" cy="0"/>
           </a:xfrm>
           <a:prstGeom prst="line">
@@ -57144,7 +57144,7 @@
         </p:nvSpPr>
         <p:spPr>
           <a:xfrm>
-            <a:off x="6287871" y="3209544"/>
+            <a:off x="6287871" y="3675887"/>
             <a:ext cx="2508427" cy="1920240"/>
           </a:xfrm>
           <a:prstGeom prst="roundRect">
@@ -57188,7 +57188,7 @@
         </p:nvSpPr>
         <p:spPr>
           <a:xfrm>
-            <a:off x="6470751" y="3026663"/>
+            <a:off x="6470751" y="3493007"/>
             <a:ext cx="384048" cy="384048"/>
           </a:xfrm>
           <a:prstGeom prst="ellipse">
@@ -57230,7 +57230,7 @@
         </p:nvSpPr>
         <p:spPr>
           <a:xfrm>
-            <a:off x="6470751" y="3104387"/>
+            <a:off x="6470751" y="3570731"/>
             <a:ext cx="384048" cy="237744"/>
           </a:xfrm>
           <a:prstGeom prst="rect">
@@ -57275,7 +57275,7 @@
         </p:nvSpPr>
         <p:spPr>
           <a:xfrm>
-            <a:off x="6489039" y="3575303"/>
+            <a:off x="6489039" y="4041648"/>
             <a:ext cx="2106091" cy="512064"/>
           </a:xfrm>
           <a:prstGeom prst="rect">
@@ -57320,7 +57320,7 @@
         </p:nvSpPr>
         <p:spPr>
           <a:xfrm>
-            <a:off x="6489039" y="4123944"/>
+            <a:off x="6489039" y="4590288"/>
             <a:ext cx="2106091" cy="841248"/>
           </a:xfrm>
           <a:prstGeom prst="rect">
@@ -57365,7 +57365,7 @@
         </p:nvCxnSpPr>
         <p:spPr>
           <a:xfrm>
-            <a:off x="8878595" y="4169663"/>
+            <a:off x="8878595" y="4636007"/>
             <a:ext cx="219456" cy="0"/>
           </a:xfrm>
           <a:prstGeom prst="line">
@@ -57402,7 +57402,7 @@
         </p:nvSpPr>
         <p:spPr>
           <a:xfrm>
-            <a:off x="9180347" y="3209544"/>
+            <a:off x="9180347" y="3675887"/>
             <a:ext cx="2508427" cy="1920240"/>
           </a:xfrm>
           <a:prstGeom prst="roundRect">
@@ -57446,7 +57446,7 @@
         </p:nvSpPr>
         <p:spPr>
           <a:xfrm>
-            <a:off x="9363227" y="3026663"/>
+            <a:off x="9363227" y="3493007"/>
             <a:ext cx="384048" cy="384048"/>
           </a:xfrm>
           <a:prstGeom prst="ellipse">
@@ -57488,7 +57488,7 @@
         </p:nvSpPr>
         <p:spPr>
           <a:xfrm>
-            <a:off x="9363227" y="3104387"/>
+            <a:off x="9363227" y="3570731"/>
             <a:ext cx="384048" cy="237744"/>
           </a:xfrm>
           <a:prstGeom prst="rect">
@@ -57533,7 +57533,7 @@
         </p:nvSpPr>
         <p:spPr>
           <a:xfrm>
-            <a:off x="9381515" y="3575303"/>
+            <a:off x="9381515" y="4041648"/>
             <a:ext cx="2106091" cy="512064"/>
           </a:xfrm>
           <a:prstGeom prst="rect">
@@ -57578,7 +57578,7 @@
         </p:nvSpPr>
         <p:spPr>
           <a:xfrm>
-            <a:off x="9381515" y="4123944"/>
+            <a:off x="9381515" y="4590288"/>
             <a:ext cx="2106091" cy="841248"/>
           </a:xfrm>
           <a:prstGeom prst="rect">
@@ -60666,7 +60666,7 @@
                 </a:solidFill>
                 <a:latin typeface="Segoe UI"/>
               </a:rPr>
-              <a:t>Proving who you are with two different kinds of thing: something you know and something you have.</a:t>
+              <a:t>Proving who you are with two different kinds of proof: something you know, have or are — not a password alone.</a:t>
             </a:r>
           </a:p>
         </p:txBody>
